--- a/assets/powerpoints/module-n3-loyer/B1-chauffe-eclaire-non-meuble.pptx
+++ b/assets/powerpoints/module-n3-loyer/B1-chauffe-eclaire-non-meuble.pptx
@@ -5765,7 +5765,7 @@
                 </a:solidFill>
                 <a:latin typeface="Verdana"/>
               </a:rPr>
-              <a:t>Le logement est libre le premier juillet.   </a:t>
+              <a:t>On peut emménager à partir du premier juillet.   </a:t>
             </a:r>
             <a:r>
               <a:rPr sz="1400" b="1" i="0">
@@ -12621,7 +12621,7 @@
                 </a:solidFill>
                 <a:latin typeface="Verdana"/>
               </a:rPr>
-              <a:t>Le logement est libre le premier juillet.</a:t>
+              <a:t>On peut emménager à partir du premier juillet.</a:t>
             </a:r>
           </a:p>
         </p:txBody>
